--- a/examples/ppt/shapes/shapes-basic.pptx
+++ b/examples/ppt/shapes/shapes-basic.pptx
@@ -5,11 +5,11 @@
     <p:sldMasterId xmlns:r="http://schemas.openxmlformats.org/officeDocument/2006/relationships" id="2147483648" r:id="rId1"/>
   </p:sldMasterIdLst>
   <p:sldIdLst>
-    <p:sldId id="256" r:id="R2702cb63f00d40cb"/>
-    <p:sldId id="257" r:id="Ra4d0b27b2fa14c0c"/>
-    <p:sldId id="258" r:id="R51d6cb7693794227"/>
-    <p:sldId id="259" r:id="Rd2965e7c73234724"/>
-    <p:sldId id="260" r:id="Rc8326d659a584e0d"/>
+    <p:sldId id="256" r:id="Rb84040c8f7cb43d1"/>
+    <p:sldId id="257" r:id="R9b46e48388b246ea"/>
+    <p:sldId id="258" r:id="R2f4491a1445e46d3"/>
+    <p:sldId id="259" r:id="R4a09d3e3d0e1464c"/>
+    <p:sldId id="260" r:id="Re64b326fe2714b9c"/>
   </p:sldIdLst>
   <p:sldSz cx="12192000" cy="6858000"/>
   <p:notesSz cx="6858000" cy="9144000"/>
@@ -284,7 +284,7 @@
 </file>
 
 <file path=ppt/slideMasters/slideMaster1.xml><?xml version="1.0" encoding="utf-8"?>
-<p:sldMaster xmlns:p="http://schemas.openxmlformats.org/presentationml/2006/main">
+<p:sldMaster xmlns:r="http://schemas.openxmlformats.org/officeDocument/2006/relationships" xmlns:p="http://schemas.openxmlformats.org/presentationml/2006/main">
   <p:cSld>
     <p:spTree>
       <p:nvGrpSpPr>
